--- a/REI-Combinatoria/08c - Fase 3_Institucionalització.pptx
+++ b/REI-Combinatoria/08c - Fase 3_Institucionalització.pptx
@@ -19,23 +19,25 @@
       <p:regular r:id="rId4"/>
     </p:embeddedFont>
     <p:embeddedFont>
-      <p:font typeface="Glacial Indifference" panose="020B0604020202020204" charset="0"/>
+      <p:font typeface="Glacial Indifference" pitchFamily="50" charset="0"/>
       <p:regular r:id="rId5"/>
+      <p:bold r:id="rId6"/>
+      <p:italic r:id="rId7"/>
     </p:embeddedFont>
     <p:embeddedFont>
       <p:font typeface="Glacial Indifference Bold" panose="020B0604020202020204" charset="0"/>
-      <p:regular r:id="rId6"/>
+      <p:regular r:id="rId8"/>
     </p:embeddedFont>
     <p:embeddedFont>
       <p:font typeface="Lato" panose="020F0502020204030203" pitchFamily="34" charset="0"/>
-      <p:regular r:id="rId7"/>
-      <p:bold r:id="rId8"/>
-      <p:italic r:id="rId9"/>
-      <p:boldItalic r:id="rId10"/>
+      <p:regular r:id="rId9"/>
+      <p:bold r:id="rId10"/>
+      <p:italic r:id="rId11"/>
+      <p:boldItalic r:id="rId12"/>
     </p:embeddedFont>
     <p:embeddedFont>
       <p:font typeface="Lato Bold" panose="020F0502020204030203" charset="0"/>
-      <p:regular r:id="rId11"/>
+      <p:regular r:id="rId13"/>
     </p:embeddedFont>
   </p:embeddedFontLst>
   <p:defaultTextStyle>
@@ -155,13 +157,45 @@
 <file path=ppt/revisionInfo.xml><?xml version="1.0" encoding="utf-8"?>
 <p1510:revInfo xmlns:a="http://schemas.openxmlformats.org/drawingml/2006/main" xmlns:r="http://schemas.openxmlformats.org/officeDocument/2006/relationships" xmlns:p1510="http://schemas.microsoft.com/office/powerpoint/2015/10/main">
   <p1510:revLst>
-    <p1510:client id="{AE1F57E9-A80A-4AC1-BEBC-AC8CB543C91F}" v="2" dt="2025-01-20T08:57:45.750"/>
+    <p1510:client id="{97B8AA32-6FD4-4164-B81D-764CDA2C06FF}" v="2" dt="2025-10-16T17:21:35.443"/>
   </p1510:revLst>
 </p1510:revInfo>
 </file>
 
 <file path=ppt/changesInfos/changesInfo1.xml><?xml version="1.0" encoding="utf-8"?>
 <pc:chgInfo xmlns:a="http://schemas.openxmlformats.org/drawingml/2006/main" xmlns:r="http://schemas.openxmlformats.org/officeDocument/2006/relationships" xmlns:ac="http://schemas.microsoft.com/office/drawing/2013/main/command" xmlns:pc="http://schemas.microsoft.com/office/powerpoint/2013/main/command">
+  <pc:docChgLst>
+    <pc:chgData name="Susana Vasquez Elias" userId="e776416f-e583-4d77-b224-146689d50a03" providerId="ADAL" clId="{3C100498-C411-419B-B5E6-C2EF21CD595F}"/>
+    <pc:docChg chg="modSld">
+      <pc:chgData name="Susana Vasquez Elias" userId="e776416f-e583-4d77-b224-146689d50a03" providerId="ADAL" clId="{3C100498-C411-419B-B5E6-C2EF21CD595F}" dt="2025-10-16T17:21:52.101" v="7" actId="1076"/>
+      <pc:docMkLst>
+        <pc:docMk/>
+      </pc:docMkLst>
+      <pc:sldChg chg="addSp modSp mod">
+        <pc:chgData name="Susana Vasquez Elias" userId="e776416f-e583-4d77-b224-146689d50a03" providerId="ADAL" clId="{3C100498-C411-419B-B5E6-C2EF21CD595F}" dt="2025-10-16T17:21:52.101" v="7" actId="1076"/>
+        <pc:sldMkLst>
+          <pc:docMk/>
+          <pc:sldMk cId="0" sldId="270"/>
+        </pc:sldMkLst>
+        <pc:picChg chg="add mod">
+          <ac:chgData name="Susana Vasquez Elias" userId="e776416f-e583-4d77-b224-146689d50a03" providerId="ADAL" clId="{3C100498-C411-419B-B5E6-C2EF21CD595F}" dt="2025-10-16T17:21:52.101" v="7" actId="1076"/>
+          <ac:picMkLst>
+            <pc:docMk/>
+            <pc:sldMk cId="0" sldId="270"/>
+            <ac:picMk id="3" creationId="{2ADF4236-C311-988C-1EAF-F33444BF8989}"/>
+          </ac:picMkLst>
+        </pc:picChg>
+        <pc:picChg chg="add mod">
+          <ac:chgData name="Susana Vasquez Elias" userId="e776416f-e583-4d77-b224-146689d50a03" providerId="ADAL" clId="{3C100498-C411-419B-B5E6-C2EF21CD595F}" dt="2025-10-16T17:21:48.961" v="6" actId="1076"/>
+          <ac:picMkLst>
+            <pc:docMk/>
+            <pc:sldMk cId="0" sldId="270"/>
+            <ac:picMk id="4" creationId="{30C983FE-D01A-C6D6-8709-92759D947C0A}"/>
+          </ac:picMkLst>
+        </pc:picChg>
+      </pc:sldChg>
+    </pc:docChg>
+  </pc:docChgLst>
   <pc:docChgLst>
     <pc:chgData name="Susana Vásquez" userId="dffc548e-2323-4ffc-a8aa-757e426c1faa" providerId="ADAL" clId="{AE1F57E9-A80A-4AC1-BEBC-AC8CB543C91F}"/>
     <pc:docChg chg="undo custSel delSld modSld modMainMaster">
@@ -273,414 +307,6 @@
           <pc:docMk/>
           <pc:sldMk cId="0" sldId="270"/>
         </pc:sldMkLst>
-        <pc:spChg chg="mod">
-          <ac:chgData name="Susana Vásquez" userId="dffc548e-2323-4ffc-a8aa-757e426c1faa" providerId="ADAL" clId="{AE1F57E9-A80A-4AC1-BEBC-AC8CB543C91F}" dt="2025-01-20T09:06:26.602" v="103" actId="14100"/>
-          <ac:spMkLst>
-            <pc:docMk/>
-            <pc:sldMk cId="0" sldId="270"/>
-            <ac:spMk id="11" creationId="{00000000-0000-0000-0000-000000000000}"/>
-          </ac:spMkLst>
-        </pc:spChg>
-        <pc:spChg chg="mod">
-          <ac:chgData name="Susana Vásquez" userId="dffc548e-2323-4ffc-a8aa-757e426c1faa" providerId="ADAL" clId="{AE1F57E9-A80A-4AC1-BEBC-AC8CB543C91F}" dt="2025-01-20T09:06:20.764" v="102" actId="14100"/>
-          <ac:spMkLst>
-            <pc:docMk/>
-            <pc:sldMk cId="0" sldId="270"/>
-            <ac:spMk id="12" creationId="{00000000-0000-0000-0000-000000000000}"/>
-          </ac:spMkLst>
-        </pc:spChg>
-        <pc:spChg chg="mod">
-          <ac:chgData name="Susana Vásquez" userId="dffc548e-2323-4ffc-a8aa-757e426c1faa" providerId="ADAL" clId="{AE1F57E9-A80A-4AC1-BEBC-AC8CB543C91F}" dt="2025-01-20T09:06:31.165" v="104" actId="14100"/>
-          <ac:spMkLst>
-            <pc:docMk/>
-            <pc:sldMk cId="0" sldId="270"/>
-            <ac:spMk id="13" creationId="{00000000-0000-0000-0000-000000000000}"/>
-          </ac:spMkLst>
-        </pc:spChg>
-        <pc:spChg chg="mod">
-          <ac:chgData name="Susana Vásquez" userId="dffc548e-2323-4ffc-a8aa-757e426c1faa" providerId="ADAL" clId="{AE1F57E9-A80A-4AC1-BEBC-AC8CB543C91F}" dt="2025-01-20T09:06:33.279" v="105" actId="14100"/>
-          <ac:spMkLst>
-            <pc:docMk/>
-            <pc:sldMk cId="0" sldId="270"/>
-            <ac:spMk id="14" creationId="{00000000-0000-0000-0000-000000000000}"/>
-          </ac:spMkLst>
-        </pc:spChg>
-        <pc:spChg chg="mod">
-          <ac:chgData name="Susana Vásquez" userId="dffc548e-2323-4ffc-a8aa-757e426c1faa" providerId="ADAL" clId="{AE1F57E9-A80A-4AC1-BEBC-AC8CB543C91F}" dt="2025-01-20T09:05:25.455" v="90" actId="14100"/>
-          <ac:spMkLst>
-            <pc:docMk/>
-            <pc:sldMk cId="0" sldId="270"/>
-            <ac:spMk id="20" creationId="{00000000-0000-0000-0000-000000000000}"/>
-          </ac:spMkLst>
-        </pc:spChg>
-        <pc:spChg chg="mod">
-          <ac:chgData name="Susana Vásquez" userId="dffc548e-2323-4ffc-a8aa-757e426c1faa" providerId="ADAL" clId="{AE1F57E9-A80A-4AC1-BEBC-AC8CB543C91F}" dt="2025-01-20T09:05:16.437" v="88" actId="14100"/>
-          <ac:spMkLst>
-            <pc:docMk/>
-            <pc:sldMk cId="0" sldId="270"/>
-            <ac:spMk id="21" creationId="{00000000-0000-0000-0000-000000000000}"/>
-          </ac:spMkLst>
-        </pc:spChg>
-        <pc:spChg chg="mod">
-          <ac:chgData name="Susana Vásquez" userId="dffc548e-2323-4ffc-a8aa-757e426c1faa" providerId="ADAL" clId="{AE1F57E9-A80A-4AC1-BEBC-AC8CB543C91F}" dt="2025-01-20T09:03:50.766" v="63" actId="790"/>
-          <ac:spMkLst>
-            <pc:docMk/>
-            <pc:sldMk cId="0" sldId="270"/>
-            <ac:spMk id="126" creationId="{1F5E5A6E-D3B6-5E52-8A60-C4486B9652A5}"/>
-          </ac:spMkLst>
-        </pc:spChg>
-        <pc:spChg chg="mod">
-          <ac:chgData name="Susana Vásquez" userId="dffc548e-2323-4ffc-a8aa-757e426c1faa" providerId="ADAL" clId="{AE1F57E9-A80A-4AC1-BEBC-AC8CB543C91F}" dt="2025-01-20T09:04:56.377" v="84" actId="403"/>
-          <ac:spMkLst>
-            <pc:docMk/>
-            <pc:sldMk cId="0" sldId="270"/>
-            <ac:spMk id="130" creationId="{422EC894-BC97-D2E9-DC7B-7D381AB82362}"/>
-          </ac:spMkLst>
-        </pc:spChg>
-        <pc:spChg chg="mod">
-          <ac:chgData name="Susana Vásquez" userId="dffc548e-2323-4ffc-a8aa-757e426c1faa" providerId="ADAL" clId="{AE1F57E9-A80A-4AC1-BEBC-AC8CB543C91F}" dt="2025-01-20T09:04:48.126" v="81" actId="1035"/>
-          <ac:spMkLst>
-            <pc:docMk/>
-            <pc:sldMk cId="0" sldId="270"/>
-            <ac:spMk id="134" creationId="{54F93E5A-6186-18D7-66E7-419EDEA66C68}"/>
-          </ac:spMkLst>
-        </pc:spChg>
-        <pc:spChg chg="mod">
-          <ac:chgData name="Susana Vásquez" userId="dffc548e-2323-4ffc-a8aa-757e426c1faa" providerId="ADAL" clId="{AE1F57E9-A80A-4AC1-BEBC-AC8CB543C91F}" dt="2025-01-20T09:02:37.093" v="54" actId="2710"/>
-          <ac:spMkLst>
-            <pc:docMk/>
-            <pc:sldMk cId="0" sldId="270"/>
-            <ac:spMk id="138" creationId="{AE7A2E66-8575-4B39-70E9-D14246EF71AB}"/>
-          </ac:spMkLst>
-        </pc:spChg>
-        <pc:spChg chg="mod">
-          <ac:chgData name="Susana Vásquez" userId="dffc548e-2323-4ffc-a8aa-757e426c1faa" providerId="ADAL" clId="{AE1F57E9-A80A-4AC1-BEBC-AC8CB543C91F}" dt="2025-01-20T09:04:56.377" v="84" actId="403"/>
-          <ac:spMkLst>
-            <pc:docMk/>
-            <pc:sldMk cId="0" sldId="270"/>
-            <ac:spMk id="142" creationId="{BF2D13DF-A22C-7533-95C1-BBAB5A150BBE}"/>
-          </ac:spMkLst>
-        </pc:spChg>
-        <pc:spChg chg="mod">
-          <ac:chgData name="Susana Vásquez" userId="dffc548e-2323-4ffc-a8aa-757e426c1faa" providerId="ADAL" clId="{AE1F57E9-A80A-4AC1-BEBC-AC8CB543C91F}" dt="2025-01-20T09:04:48.126" v="81" actId="1035"/>
-          <ac:spMkLst>
-            <pc:docMk/>
-            <pc:sldMk cId="0" sldId="270"/>
-            <ac:spMk id="145" creationId="{26110AA7-572C-08AE-461F-270CF3C293B6}"/>
-          </ac:spMkLst>
-        </pc:spChg>
-        <pc:spChg chg="mod">
-          <ac:chgData name="Susana Vásquez" userId="dffc548e-2323-4ffc-a8aa-757e426c1faa" providerId="ADAL" clId="{AE1F57E9-A80A-4AC1-BEBC-AC8CB543C91F}" dt="2025-01-20T08:57:22.171" v="2"/>
-          <ac:spMkLst>
-            <pc:docMk/>
-            <pc:sldMk cId="0" sldId="270"/>
-            <ac:spMk id="146" creationId="{44936B27-DAA3-2695-4CF4-261A33365698}"/>
-          </ac:spMkLst>
-        </pc:spChg>
-        <pc:spChg chg="mod">
-          <ac:chgData name="Susana Vásquez" userId="dffc548e-2323-4ffc-a8aa-757e426c1faa" providerId="ADAL" clId="{AE1F57E9-A80A-4AC1-BEBC-AC8CB543C91F}" dt="2025-01-20T09:04:48.126" v="81" actId="1035"/>
-          <ac:spMkLst>
-            <pc:docMk/>
-            <pc:sldMk cId="0" sldId="270"/>
-            <ac:spMk id="149" creationId="{8B369669-0B54-65A1-73C4-A06C80C5B673}"/>
-          </ac:spMkLst>
-        </pc:spChg>
-        <pc:spChg chg="mod">
-          <ac:chgData name="Susana Vásquez" userId="dffc548e-2323-4ffc-a8aa-757e426c1faa" providerId="ADAL" clId="{AE1F57E9-A80A-4AC1-BEBC-AC8CB543C91F}" dt="2025-01-20T09:01:58.080" v="44" actId="14100"/>
-          <ac:spMkLst>
-            <pc:docMk/>
-            <pc:sldMk cId="0" sldId="270"/>
-            <ac:spMk id="152" creationId="{D528A0FC-EC13-62EA-C989-DE58891E26CE}"/>
-          </ac:spMkLst>
-        </pc:spChg>
-        <pc:spChg chg="mod">
-          <ac:chgData name="Susana Vásquez" userId="dffc548e-2323-4ffc-a8aa-757e426c1faa" providerId="ADAL" clId="{AE1F57E9-A80A-4AC1-BEBC-AC8CB543C91F}" dt="2025-01-20T09:02:37.093" v="54" actId="2710"/>
-          <ac:spMkLst>
-            <pc:docMk/>
-            <pc:sldMk cId="0" sldId="270"/>
-            <ac:spMk id="156" creationId="{215BD9D1-CAF9-9CAE-6BFA-C94A9F18C17D}"/>
-          </ac:spMkLst>
-        </pc:spChg>
-        <pc:spChg chg="mod">
-          <ac:chgData name="Susana Vásquez" userId="dffc548e-2323-4ffc-a8aa-757e426c1faa" providerId="ADAL" clId="{AE1F57E9-A80A-4AC1-BEBC-AC8CB543C91F}" dt="2025-01-20T09:02:05.288" v="47" actId="1076"/>
-          <ac:spMkLst>
-            <pc:docMk/>
-            <pc:sldMk cId="0" sldId="270"/>
-            <ac:spMk id="160" creationId="{0D9D348E-ECE8-2153-FA79-8DB1E756E870}"/>
-          </ac:spMkLst>
-        </pc:spChg>
-        <pc:spChg chg="mod">
-          <ac:chgData name="Susana Vásquez" userId="dffc548e-2323-4ffc-a8aa-757e426c1faa" providerId="ADAL" clId="{AE1F57E9-A80A-4AC1-BEBC-AC8CB543C91F}" dt="2025-01-20T08:57:22.171" v="2"/>
-          <ac:spMkLst>
-            <pc:docMk/>
-            <pc:sldMk cId="0" sldId="270"/>
-            <ac:spMk id="165" creationId="{F5A6671D-707C-CC65-68B5-D2013F1EB058}"/>
-          </ac:spMkLst>
-        </pc:spChg>
-        <pc:spChg chg="mod">
-          <ac:chgData name="Susana Vásquez" userId="dffc548e-2323-4ffc-a8aa-757e426c1faa" providerId="ADAL" clId="{AE1F57E9-A80A-4AC1-BEBC-AC8CB543C91F}" dt="2025-01-20T09:06:55.081" v="107" actId="14100"/>
-          <ac:spMkLst>
-            <pc:docMk/>
-            <pc:sldMk cId="0" sldId="270"/>
-            <ac:spMk id="172" creationId="{902B908A-755C-A89D-FD49-020B9C63977B}"/>
-          </ac:spMkLst>
-        </pc:spChg>
-        <pc:spChg chg="mod">
-          <ac:chgData name="Susana Vásquez" userId="dffc548e-2323-4ffc-a8aa-757e426c1faa" providerId="ADAL" clId="{AE1F57E9-A80A-4AC1-BEBC-AC8CB543C91F}" dt="2025-01-20T09:03:50.766" v="63" actId="790"/>
-          <ac:spMkLst>
-            <pc:docMk/>
-            <pc:sldMk cId="0" sldId="270"/>
-            <ac:spMk id="173" creationId="{69E098C6-7027-6994-57A9-4195D81A600A}"/>
-          </ac:spMkLst>
-        </pc:spChg>
-        <pc:spChg chg="mod">
-          <ac:chgData name="Susana Vásquez" userId="dffc548e-2323-4ffc-a8aa-757e426c1faa" providerId="ADAL" clId="{AE1F57E9-A80A-4AC1-BEBC-AC8CB543C91F}" dt="2025-01-20T09:02:18.047" v="51" actId="1076"/>
-          <ac:spMkLst>
-            <pc:docMk/>
-            <pc:sldMk cId="0" sldId="270"/>
-            <ac:spMk id="176" creationId="{9DF556C8-DF1F-C604-DB74-364B201560D6}"/>
-          </ac:spMkLst>
-        </pc:spChg>
-        <pc:spChg chg="mod">
-          <ac:chgData name="Susana Vásquez" userId="dffc548e-2323-4ffc-a8aa-757e426c1faa" providerId="ADAL" clId="{AE1F57E9-A80A-4AC1-BEBC-AC8CB543C91F}" dt="2025-01-20T09:02:10.542" v="48" actId="14100"/>
-          <ac:spMkLst>
-            <pc:docMk/>
-            <pc:sldMk cId="0" sldId="270"/>
-            <ac:spMk id="177" creationId="{EC4A35FB-08B5-7E68-C414-DBAAE1E241EC}"/>
-          </ac:spMkLst>
-        </pc:spChg>
-        <pc:spChg chg="mod">
-          <ac:chgData name="Susana Vásquez" userId="dffc548e-2323-4ffc-a8aa-757e426c1faa" providerId="ADAL" clId="{AE1F57E9-A80A-4AC1-BEBC-AC8CB543C91F}" dt="2025-01-20T09:03:50.766" v="63" actId="790"/>
-          <ac:spMkLst>
-            <pc:docMk/>
-            <pc:sldMk cId="0" sldId="270"/>
-            <ac:spMk id="178" creationId="{DB13CD61-6CEE-2559-23BB-C062F1AE11A9}"/>
-          </ac:spMkLst>
-        </pc:spChg>
-        <pc:spChg chg="mod">
-          <ac:chgData name="Susana Vásquez" userId="dffc548e-2323-4ffc-a8aa-757e426c1faa" providerId="ADAL" clId="{AE1F57E9-A80A-4AC1-BEBC-AC8CB543C91F}" dt="2025-01-20T09:04:48.126" v="81" actId="1035"/>
-          <ac:spMkLst>
-            <pc:docMk/>
-            <pc:sldMk cId="0" sldId="270"/>
-            <ac:spMk id="181" creationId="{D86AB75E-7F2F-1144-E4AF-04E3D524E052}"/>
-          </ac:spMkLst>
-        </pc:spChg>
-        <pc:spChg chg="mod">
-          <ac:chgData name="Susana Vásquez" userId="dffc548e-2323-4ffc-a8aa-757e426c1faa" providerId="ADAL" clId="{AE1F57E9-A80A-4AC1-BEBC-AC8CB543C91F}" dt="2025-01-20T09:01:42.844" v="38" actId="1076"/>
-          <ac:spMkLst>
-            <pc:docMk/>
-            <pc:sldMk cId="0" sldId="270"/>
-            <ac:spMk id="184" creationId="{C9E768AA-FB3A-C727-4142-6971F87A3831}"/>
-          </ac:spMkLst>
-        </pc:spChg>
-        <pc:spChg chg="mod">
-          <ac:chgData name="Susana Vásquez" userId="dffc548e-2323-4ffc-a8aa-757e426c1faa" providerId="ADAL" clId="{AE1F57E9-A80A-4AC1-BEBC-AC8CB543C91F}" dt="2025-01-20T09:06:48.430" v="106" actId="14100"/>
-          <ac:spMkLst>
-            <pc:docMk/>
-            <pc:sldMk cId="0" sldId="270"/>
-            <ac:spMk id="188" creationId="{A20555BB-EC3A-68C3-5F6C-2EA01EAB9F6E}"/>
-          </ac:spMkLst>
-        </pc:spChg>
-        <pc:spChg chg="mod">
-          <ac:chgData name="Susana Vásquez" userId="dffc548e-2323-4ffc-a8aa-757e426c1faa" providerId="ADAL" clId="{AE1F57E9-A80A-4AC1-BEBC-AC8CB543C91F}" dt="2025-01-20T09:02:37.093" v="54" actId="2710"/>
-          <ac:spMkLst>
-            <pc:docMk/>
-            <pc:sldMk cId="0" sldId="270"/>
-            <ac:spMk id="189" creationId="{03BE7FB8-A832-1C88-7BD4-AF7180A95505}"/>
-          </ac:spMkLst>
-        </pc:spChg>
-        <pc:spChg chg="mod">
-          <ac:chgData name="Susana Vásquez" userId="dffc548e-2323-4ffc-a8aa-757e426c1faa" providerId="ADAL" clId="{AE1F57E9-A80A-4AC1-BEBC-AC8CB543C91F}" dt="2025-01-20T09:03:50.766" v="63" actId="790"/>
-          <ac:spMkLst>
-            <pc:docMk/>
-            <pc:sldMk cId="0" sldId="270"/>
-            <ac:spMk id="191" creationId="{585E7159-5015-C86B-2DEC-A019749DF4EB}"/>
-          </ac:spMkLst>
-        </pc:spChg>
-        <pc:spChg chg="mod">
-          <ac:chgData name="Susana Vásquez" userId="dffc548e-2323-4ffc-a8aa-757e426c1faa" providerId="ADAL" clId="{AE1F57E9-A80A-4AC1-BEBC-AC8CB543C91F}" dt="2025-01-20T08:57:45.750" v="7" actId="164"/>
-          <ac:spMkLst>
-            <pc:docMk/>
-            <pc:sldMk cId="0" sldId="270"/>
-            <ac:spMk id="192" creationId="{630B4BAC-77F0-9104-B29D-C407D266A7BF}"/>
-          </ac:spMkLst>
-        </pc:spChg>
-        <pc:spChg chg="mod">
-          <ac:chgData name="Susana Vásquez" userId="dffc548e-2323-4ffc-a8aa-757e426c1faa" providerId="ADAL" clId="{AE1F57E9-A80A-4AC1-BEBC-AC8CB543C91F}" dt="2025-01-20T09:03:50.766" v="63" actId="790"/>
-          <ac:spMkLst>
-            <pc:docMk/>
-            <pc:sldMk cId="0" sldId="270"/>
-            <ac:spMk id="193" creationId="{1C54DEFF-74DB-1CB3-D827-FA4CD1419B6B}"/>
-          </ac:spMkLst>
-        </pc:spChg>
-        <pc:spChg chg="mod">
-          <ac:chgData name="Susana Vásquez" userId="dffc548e-2323-4ffc-a8aa-757e426c1faa" providerId="ADAL" clId="{AE1F57E9-A80A-4AC1-BEBC-AC8CB543C91F}" dt="2025-01-20T08:57:22.171" v="2"/>
-          <ac:spMkLst>
-            <pc:docMk/>
-            <pc:sldMk cId="0" sldId="270"/>
-            <ac:spMk id="198" creationId="{C5C8A244-DFE1-8DE0-36FD-B1A9025B548C}"/>
-          </ac:spMkLst>
-        </pc:spChg>
-        <pc:spChg chg="mod">
-          <ac:chgData name="Susana Vásquez" userId="dffc548e-2323-4ffc-a8aa-757e426c1faa" providerId="ADAL" clId="{AE1F57E9-A80A-4AC1-BEBC-AC8CB543C91F}" dt="2025-01-20T08:57:45.750" v="7" actId="164"/>
-          <ac:spMkLst>
-            <pc:docMk/>
-            <pc:sldMk cId="0" sldId="270"/>
-            <ac:spMk id="199" creationId="{4501F22C-3BD4-3A12-03BA-5E7ADC10E1A9}"/>
-          </ac:spMkLst>
-        </pc:spChg>
-        <pc:spChg chg="mod">
-          <ac:chgData name="Susana Vásquez" userId="dffc548e-2323-4ffc-a8aa-757e426c1faa" providerId="ADAL" clId="{AE1F57E9-A80A-4AC1-BEBC-AC8CB543C91F}" dt="2025-01-20T08:57:22.171" v="2"/>
-          <ac:spMkLst>
-            <pc:docMk/>
-            <pc:sldMk cId="0" sldId="270"/>
-            <ac:spMk id="205" creationId="{7F6C5105-791B-B6F5-734E-653A520815B8}"/>
-          </ac:spMkLst>
-        </pc:spChg>
-        <pc:spChg chg="mod">
-          <ac:chgData name="Susana Vásquez" userId="dffc548e-2323-4ffc-a8aa-757e426c1faa" providerId="ADAL" clId="{AE1F57E9-A80A-4AC1-BEBC-AC8CB543C91F}" dt="2025-01-20T08:57:22.171" v="2"/>
-          <ac:spMkLst>
-            <pc:docMk/>
-            <pc:sldMk cId="0" sldId="270"/>
-            <ac:spMk id="208" creationId="{17FFE33E-A547-B486-8CF3-86E56FAEB4B5}"/>
-          </ac:spMkLst>
-        </pc:spChg>
-        <pc:spChg chg="mod">
-          <ac:chgData name="Susana Vásquez" userId="dffc548e-2323-4ffc-a8aa-757e426c1faa" providerId="ADAL" clId="{AE1F57E9-A80A-4AC1-BEBC-AC8CB543C91F}" dt="2025-01-20T08:57:45.750" v="7" actId="164"/>
-          <ac:spMkLst>
-            <pc:docMk/>
-            <pc:sldMk cId="0" sldId="270"/>
-            <ac:spMk id="211" creationId="{75922A35-3E69-5C37-D589-D34757C06106}"/>
-          </ac:spMkLst>
-        </pc:spChg>
-        <pc:spChg chg="mod">
-          <ac:chgData name="Susana Vásquez" userId="dffc548e-2323-4ffc-a8aa-757e426c1faa" providerId="ADAL" clId="{AE1F57E9-A80A-4AC1-BEBC-AC8CB543C91F}" dt="2025-01-20T08:57:45.750" v="7" actId="164"/>
-          <ac:spMkLst>
-            <pc:docMk/>
-            <pc:sldMk cId="0" sldId="270"/>
-            <ac:spMk id="218" creationId="{9B2F9F91-3259-8EA1-14B1-7C9944CD7F3F}"/>
-          </ac:spMkLst>
-        </pc:spChg>
-        <pc:spChg chg="mod">
-          <ac:chgData name="Susana Vásquez" userId="dffc548e-2323-4ffc-a8aa-757e426c1faa" providerId="ADAL" clId="{AE1F57E9-A80A-4AC1-BEBC-AC8CB543C91F}" dt="2025-01-20T08:57:45.750" v="7" actId="164"/>
-          <ac:spMkLst>
-            <pc:docMk/>
-            <pc:sldMk cId="0" sldId="270"/>
-            <ac:spMk id="222" creationId="{EB0BB578-EFE7-4B4A-E89C-7CCA298A77A5}"/>
-          </ac:spMkLst>
-        </pc:spChg>
-        <pc:spChg chg="mod">
-          <ac:chgData name="Susana Vásquez" userId="dffc548e-2323-4ffc-a8aa-757e426c1faa" providerId="ADAL" clId="{AE1F57E9-A80A-4AC1-BEBC-AC8CB543C91F}" dt="2025-01-20T09:03:50.766" v="63" actId="790"/>
-          <ac:spMkLst>
-            <pc:docMk/>
-            <pc:sldMk cId="0" sldId="270"/>
-            <ac:spMk id="225" creationId="{B647C3CD-B95B-38E9-4B44-99C9FB2CBE4E}"/>
-          </ac:spMkLst>
-        </pc:spChg>
-        <pc:spChg chg="mod">
-          <ac:chgData name="Susana Vásquez" userId="dffc548e-2323-4ffc-a8aa-757e426c1faa" providerId="ADAL" clId="{AE1F57E9-A80A-4AC1-BEBC-AC8CB543C91F}" dt="2025-01-20T09:04:31.495" v="73" actId="403"/>
-          <ac:spMkLst>
-            <pc:docMk/>
-            <pc:sldMk cId="0" sldId="270"/>
-            <ac:spMk id="228" creationId="{65232AB3-64CC-95ED-2536-FF7D5EF7FD79}"/>
-          </ac:spMkLst>
-        </pc:spChg>
-        <pc:spChg chg="mod">
-          <ac:chgData name="Susana Vásquez" userId="dffc548e-2323-4ffc-a8aa-757e426c1faa" providerId="ADAL" clId="{AE1F57E9-A80A-4AC1-BEBC-AC8CB543C91F}" dt="2025-01-20T09:04:31.495" v="73" actId="403"/>
-          <ac:spMkLst>
-            <pc:docMk/>
-            <pc:sldMk cId="0" sldId="270"/>
-            <ac:spMk id="229" creationId="{C9B0702A-2B28-2289-47AF-A9C7AA610A57}"/>
-          </ac:spMkLst>
-        </pc:spChg>
-        <pc:spChg chg="mod">
-          <ac:chgData name="Susana Vásquez" userId="dffc548e-2323-4ffc-a8aa-757e426c1faa" providerId="ADAL" clId="{AE1F57E9-A80A-4AC1-BEBC-AC8CB543C91F}" dt="2025-01-20T09:03:28.473" v="59" actId="255"/>
-          <ac:spMkLst>
-            <pc:docMk/>
-            <pc:sldMk cId="0" sldId="270"/>
-            <ac:spMk id="230" creationId="{019A9C3E-A76B-780A-F017-D8C7E4488739}"/>
-          </ac:spMkLst>
-        </pc:spChg>
-        <pc:spChg chg="mod">
-          <ac:chgData name="Susana Vásquez" userId="dffc548e-2323-4ffc-a8aa-757e426c1faa" providerId="ADAL" clId="{AE1F57E9-A80A-4AC1-BEBC-AC8CB543C91F}" dt="2025-01-20T09:04:36.716" v="75" actId="403"/>
-          <ac:spMkLst>
-            <pc:docMk/>
-            <pc:sldMk cId="0" sldId="270"/>
-            <ac:spMk id="231" creationId="{CDC70BB6-E80C-92EC-098A-9762A0E1DB6A}"/>
-          </ac:spMkLst>
-        </pc:spChg>
-        <pc:spChg chg="mod">
-          <ac:chgData name="Susana Vásquez" userId="dffc548e-2323-4ffc-a8aa-757e426c1faa" providerId="ADAL" clId="{AE1F57E9-A80A-4AC1-BEBC-AC8CB543C91F}" dt="2025-01-20T09:03:41.256" v="62" actId="404"/>
-          <ac:spMkLst>
-            <pc:docMk/>
-            <pc:sldMk cId="0" sldId="270"/>
-            <ac:spMk id="232" creationId="{DBCE89D2-FE62-650D-FCEB-D87283B2E631}"/>
-          </ac:spMkLst>
-        </pc:spChg>
-        <pc:spChg chg="mod">
-          <ac:chgData name="Susana Vásquez" userId="dffc548e-2323-4ffc-a8aa-757e426c1faa" providerId="ADAL" clId="{AE1F57E9-A80A-4AC1-BEBC-AC8CB543C91F}" dt="2025-01-20T09:04:36.716" v="75" actId="403"/>
-          <ac:spMkLst>
-            <pc:docMk/>
-            <pc:sldMk cId="0" sldId="270"/>
-            <ac:spMk id="233" creationId="{2D674BB8-A6BD-3409-AD76-70523146791D}"/>
-          </ac:spMkLst>
-        </pc:spChg>
-        <pc:spChg chg="mod">
-          <ac:chgData name="Susana Vásquez" userId="dffc548e-2323-4ffc-a8aa-757e426c1faa" providerId="ADAL" clId="{AE1F57E9-A80A-4AC1-BEBC-AC8CB543C91F}" dt="2025-01-20T09:03:55.741" v="64" actId="1076"/>
-          <ac:spMkLst>
-            <pc:docMk/>
-            <pc:sldMk cId="0" sldId="270"/>
-            <ac:spMk id="234" creationId="{0A3123EF-A60C-A9F9-213E-F85887D83881}"/>
-          </ac:spMkLst>
-        </pc:spChg>
-        <pc:spChg chg="mod">
-          <ac:chgData name="Susana Vásquez" userId="dffc548e-2323-4ffc-a8aa-757e426c1faa" providerId="ADAL" clId="{AE1F57E9-A80A-4AC1-BEBC-AC8CB543C91F}" dt="2025-01-20T09:04:40.636" v="76" actId="14100"/>
-          <ac:spMkLst>
-            <pc:docMk/>
-            <pc:sldMk cId="0" sldId="270"/>
-            <ac:spMk id="235" creationId="{13AF1DE4-4E1D-585E-F855-B2420BC58E3B}"/>
-          </ac:spMkLst>
-        </pc:spChg>
-        <pc:spChg chg="mod">
-          <ac:chgData name="Susana Vásquez" userId="dffc548e-2323-4ffc-a8aa-757e426c1faa" providerId="ADAL" clId="{AE1F57E9-A80A-4AC1-BEBC-AC8CB543C91F}" dt="2025-01-20T09:04:01.801" v="65" actId="1076"/>
-          <ac:spMkLst>
-            <pc:docMk/>
-            <pc:sldMk cId="0" sldId="270"/>
-            <ac:spMk id="236" creationId="{229D1FFC-BC16-ABFE-2EE1-EA797A7B5AFA}"/>
-          </ac:spMkLst>
-        </pc:spChg>
-        <pc:spChg chg="mod">
-          <ac:chgData name="Susana Vásquez" userId="dffc548e-2323-4ffc-a8aa-757e426c1faa" providerId="ADAL" clId="{AE1F57E9-A80A-4AC1-BEBC-AC8CB543C91F}" dt="2025-01-20T09:04:36.716" v="75" actId="403"/>
-          <ac:spMkLst>
-            <pc:docMk/>
-            <pc:sldMk cId="0" sldId="270"/>
-            <ac:spMk id="237" creationId="{73F2DCB2-2789-43A2-FFF9-CEDD326A0C16}"/>
-          </ac:spMkLst>
-        </pc:spChg>
-        <pc:spChg chg="mod">
-          <ac:chgData name="Susana Vásquez" userId="dffc548e-2323-4ffc-a8aa-757e426c1faa" providerId="ADAL" clId="{AE1F57E9-A80A-4AC1-BEBC-AC8CB543C91F}" dt="2025-01-20T09:04:20.104" v="69" actId="20577"/>
-          <ac:spMkLst>
-            <pc:docMk/>
-            <pc:sldMk cId="0" sldId="270"/>
-            <ac:spMk id="238" creationId="{D450CA47-9309-EB07-7097-9ACA6D6F24DF}"/>
-          </ac:spMkLst>
-        </pc:spChg>
-        <pc:spChg chg="mod">
-          <ac:chgData name="Susana Vásquez" userId="dffc548e-2323-4ffc-a8aa-757e426c1faa" providerId="ADAL" clId="{AE1F57E9-A80A-4AC1-BEBC-AC8CB543C91F}" dt="2025-01-20T09:04:31.495" v="73" actId="403"/>
-          <ac:spMkLst>
-            <pc:docMk/>
-            <pc:sldMk cId="0" sldId="270"/>
-            <ac:spMk id="239" creationId="{AE827021-911D-598C-563E-A85A5A65AC11}"/>
-          </ac:spMkLst>
-        </pc:spChg>
-        <pc:grpChg chg="mod">
-          <ac:chgData name="Susana Vásquez" userId="dffc548e-2323-4ffc-a8aa-757e426c1faa" providerId="ADAL" clId="{AE1F57E9-A80A-4AC1-BEBC-AC8CB543C91F}" dt="2025-01-20T09:05:44.332" v="95" actId="14100"/>
-          <ac:grpSpMkLst>
-            <pc:docMk/>
-            <pc:sldMk cId="0" sldId="270"/>
-            <ac:grpSpMk id="2" creationId="{A170EC53-0F9E-C079-9999-6379657766E7}"/>
-          </ac:grpSpMkLst>
-        </pc:grpChg>
       </pc:sldChg>
       <pc:sldChg chg="del">
         <pc:chgData name="Susana Vásquez" userId="dffc548e-2323-4ffc-a8aa-757e426c1faa" providerId="ADAL" clId="{AE1F57E9-A80A-4AC1-BEBC-AC8CB543C91F}" dt="2025-01-20T08:57:08.092" v="1" actId="47"/>
@@ -709,46 +335,6 @@
           <pc:docMk/>
           <pc:sldMasterMk cId="0" sldId="2147483648"/>
         </pc:sldMasterMkLst>
-        <pc:spChg chg="mod">
-          <ac:chgData name="Susana Vásquez" userId="dffc548e-2323-4ffc-a8aa-757e426c1faa" providerId="ADAL" clId="{AE1F57E9-A80A-4AC1-BEBC-AC8CB543C91F}" dt="2025-01-20T08:57:22.171" v="2"/>
-          <ac:spMkLst>
-            <pc:docMk/>
-            <pc:sldMasterMk cId="0" sldId="2147483648"/>
-            <ac:spMk id="2" creationId="{00000000-0000-0000-0000-000000000000}"/>
-          </ac:spMkLst>
-        </pc:spChg>
-        <pc:spChg chg="mod">
-          <ac:chgData name="Susana Vásquez" userId="dffc548e-2323-4ffc-a8aa-757e426c1faa" providerId="ADAL" clId="{AE1F57E9-A80A-4AC1-BEBC-AC8CB543C91F}" dt="2025-01-20T08:57:22.171" v="2"/>
-          <ac:spMkLst>
-            <pc:docMk/>
-            <pc:sldMasterMk cId="0" sldId="2147483648"/>
-            <ac:spMk id="3" creationId="{00000000-0000-0000-0000-000000000000}"/>
-          </ac:spMkLst>
-        </pc:spChg>
-        <pc:spChg chg="mod">
-          <ac:chgData name="Susana Vásquez" userId="dffc548e-2323-4ffc-a8aa-757e426c1faa" providerId="ADAL" clId="{AE1F57E9-A80A-4AC1-BEBC-AC8CB543C91F}" dt="2025-01-20T08:57:22.171" v="2"/>
-          <ac:spMkLst>
-            <pc:docMk/>
-            <pc:sldMasterMk cId="0" sldId="2147483648"/>
-            <ac:spMk id="4" creationId="{00000000-0000-0000-0000-000000000000}"/>
-          </ac:spMkLst>
-        </pc:spChg>
-        <pc:spChg chg="mod">
-          <ac:chgData name="Susana Vásquez" userId="dffc548e-2323-4ffc-a8aa-757e426c1faa" providerId="ADAL" clId="{AE1F57E9-A80A-4AC1-BEBC-AC8CB543C91F}" dt="2025-01-20T08:57:22.171" v="2"/>
-          <ac:spMkLst>
-            <pc:docMk/>
-            <pc:sldMasterMk cId="0" sldId="2147483648"/>
-            <ac:spMk id="5" creationId="{00000000-0000-0000-0000-000000000000}"/>
-          </ac:spMkLst>
-        </pc:spChg>
-        <pc:spChg chg="mod">
-          <ac:chgData name="Susana Vásquez" userId="dffc548e-2323-4ffc-a8aa-757e426c1faa" providerId="ADAL" clId="{AE1F57E9-A80A-4AC1-BEBC-AC8CB543C91F}" dt="2025-01-20T08:57:22.171" v="2"/>
-          <ac:spMkLst>
-            <pc:docMk/>
-            <pc:sldMasterMk cId="0" sldId="2147483648"/>
-            <ac:spMk id="6" creationId="{00000000-0000-0000-0000-000000000000}"/>
-          </ac:spMkLst>
-        </pc:spChg>
         <pc:sldLayoutChg chg="modSp">
           <pc:chgData name="Susana Vásquez" userId="dffc548e-2323-4ffc-a8aa-757e426c1faa" providerId="ADAL" clId="{AE1F57E9-A80A-4AC1-BEBC-AC8CB543C91F}" dt="2025-01-20T08:57:22.171" v="2"/>
           <pc:sldLayoutMkLst>
@@ -756,24 +342,6 @@
             <pc:sldMasterMk cId="0" sldId="2147483648"/>
             <pc:sldLayoutMk cId="0" sldId="2147483649"/>
           </pc:sldLayoutMkLst>
-          <pc:spChg chg="mod">
-            <ac:chgData name="Susana Vásquez" userId="dffc548e-2323-4ffc-a8aa-757e426c1faa" providerId="ADAL" clId="{AE1F57E9-A80A-4AC1-BEBC-AC8CB543C91F}" dt="2025-01-20T08:57:22.171" v="2"/>
-            <ac:spMkLst>
-              <pc:docMk/>
-              <pc:sldMasterMk cId="0" sldId="2147483648"/>
-              <pc:sldLayoutMk cId="0" sldId="2147483649"/>
-              <ac:spMk id="2" creationId="{00000000-0000-0000-0000-000000000000}"/>
-            </ac:spMkLst>
-          </pc:spChg>
-          <pc:spChg chg="mod">
-            <ac:chgData name="Susana Vásquez" userId="dffc548e-2323-4ffc-a8aa-757e426c1faa" providerId="ADAL" clId="{AE1F57E9-A80A-4AC1-BEBC-AC8CB543C91F}" dt="2025-01-20T08:57:22.171" v="2"/>
-            <ac:spMkLst>
-              <pc:docMk/>
-              <pc:sldMasterMk cId="0" sldId="2147483648"/>
-              <pc:sldLayoutMk cId="0" sldId="2147483649"/>
-              <ac:spMk id="3" creationId="{00000000-0000-0000-0000-000000000000}"/>
-            </ac:spMkLst>
-          </pc:spChg>
         </pc:sldLayoutChg>
         <pc:sldLayoutChg chg="modSp">
           <pc:chgData name="Susana Vásquez" userId="dffc548e-2323-4ffc-a8aa-757e426c1faa" providerId="ADAL" clId="{AE1F57E9-A80A-4AC1-BEBC-AC8CB543C91F}" dt="2025-01-20T08:57:22.171" v="2"/>
@@ -782,24 +350,6 @@
             <pc:sldMasterMk cId="0" sldId="2147483648"/>
             <pc:sldLayoutMk cId="0" sldId="2147483651"/>
           </pc:sldLayoutMkLst>
-          <pc:spChg chg="mod">
-            <ac:chgData name="Susana Vásquez" userId="dffc548e-2323-4ffc-a8aa-757e426c1faa" providerId="ADAL" clId="{AE1F57E9-A80A-4AC1-BEBC-AC8CB543C91F}" dt="2025-01-20T08:57:22.171" v="2"/>
-            <ac:spMkLst>
-              <pc:docMk/>
-              <pc:sldMasterMk cId="0" sldId="2147483648"/>
-              <pc:sldLayoutMk cId="0" sldId="2147483651"/>
-              <ac:spMk id="2" creationId="{00000000-0000-0000-0000-000000000000}"/>
-            </ac:spMkLst>
-          </pc:spChg>
-          <pc:spChg chg="mod">
-            <ac:chgData name="Susana Vásquez" userId="dffc548e-2323-4ffc-a8aa-757e426c1faa" providerId="ADAL" clId="{AE1F57E9-A80A-4AC1-BEBC-AC8CB543C91F}" dt="2025-01-20T08:57:22.171" v="2"/>
-            <ac:spMkLst>
-              <pc:docMk/>
-              <pc:sldMasterMk cId="0" sldId="2147483648"/>
-              <pc:sldLayoutMk cId="0" sldId="2147483651"/>
-              <ac:spMk id="3" creationId="{00000000-0000-0000-0000-000000000000}"/>
-            </ac:spMkLst>
-          </pc:spChg>
         </pc:sldLayoutChg>
         <pc:sldLayoutChg chg="modSp">
           <pc:chgData name="Susana Vásquez" userId="dffc548e-2323-4ffc-a8aa-757e426c1faa" providerId="ADAL" clId="{AE1F57E9-A80A-4AC1-BEBC-AC8CB543C91F}" dt="2025-01-20T08:57:22.171" v="2"/>
@@ -808,24 +358,6 @@
             <pc:sldMasterMk cId="0" sldId="2147483648"/>
             <pc:sldLayoutMk cId="0" sldId="2147483652"/>
           </pc:sldLayoutMkLst>
-          <pc:spChg chg="mod">
-            <ac:chgData name="Susana Vásquez" userId="dffc548e-2323-4ffc-a8aa-757e426c1faa" providerId="ADAL" clId="{AE1F57E9-A80A-4AC1-BEBC-AC8CB543C91F}" dt="2025-01-20T08:57:22.171" v="2"/>
-            <ac:spMkLst>
-              <pc:docMk/>
-              <pc:sldMasterMk cId="0" sldId="2147483648"/>
-              <pc:sldLayoutMk cId="0" sldId="2147483652"/>
-              <ac:spMk id="3" creationId="{00000000-0000-0000-0000-000000000000}"/>
-            </ac:spMkLst>
-          </pc:spChg>
-          <pc:spChg chg="mod">
-            <ac:chgData name="Susana Vásquez" userId="dffc548e-2323-4ffc-a8aa-757e426c1faa" providerId="ADAL" clId="{AE1F57E9-A80A-4AC1-BEBC-AC8CB543C91F}" dt="2025-01-20T08:57:22.171" v="2"/>
-            <ac:spMkLst>
-              <pc:docMk/>
-              <pc:sldMasterMk cId="0" sldId="2147483648"/>
-              <pc:sldLayoutMk cId="0" sldId="2147483652"/>
-              <ac:spMk id="4" creationId="{00000000-0000-0000-0000-000000000000}"/>
-            </ac:spMkLst>
-          </pc:spChg>
         </pc:sldLayoutChg>
         <pc:sldLayoutChg chg="modSp">
           <pc:chgData name="Susana Vásquez" userId="dffc548e-2323-4ffc-a8aa-757e426c1faa" providerId="ADAL" clId="{AE1F57E9-A80A-4AC1-BEBC-AC8CB543C91F}" dt="2025-01-20T08:57:22.171" v="2"/>
@@ -834,42 +366,6 @@
             <pc:sldMasterMk cId="0" sldId="2147483648"/>
             <pc:sldLayoutMk cId="0" sldId="2147483653"/>
           </pc:sldLayoutMkLst>
-          <pc:spChg chg="mod">
-            <ac:chgData name="Susana Vásquez" userId="dffc548e-2323-4ffc-a8aa-757e426c1faa" providerId="ADAL" clId="{AE1F57E9-A80A-4AC1-BEBC-AC8CB543C91F}" dt="2025-01-20T08:57:22.171" v="2"/>
-            <ac:spMkLst>
-              <pc:docMk/>
-              <pc:sldMasterMk cId="0" sldId="2147483648"/>
-              <pc:sldLayoutMk cId="0" sldId="2147483653"/>
-              <ac:spMk id="3" creationId="{00000000-0000-0000-0000-000000000000}"/>
-            </ac:spMkLst>
-          </pc:spChg>
-          <pc:spChg chg="mod">
-            <ac:chgData name="Susana Vásquez" userId="dffc548e-2323-4ffc-a8aa-757e426c1faa" providerId="ADAL" clId="{AE1F57E9-A80A-4AC1-BEBC-AC8CB543C91F}" dt="2025-01-20T08:57:22.171" v="2"/>
-            <ac:spMkLst>
-              <pc:docMk/>
-              <pc:sldMasterMk cId="0" sldId="2147483648"/>
-              <pc:sldLayoutMk cId="0" sldId="2147483653"/>
-              <ac:spMk id="4" creationId="{00000000-0000-0000-0000-000000000000}"/>
-            </ac:spMkLst>
-          </pc:spChg>
-          <pc:spChg chg="mod">
-            <ac:chgData name="Susana Vásquez" userId="dffc548e-2323-4ffc-a8aa-757e426c1faa" providerId="ADAL" clId="{AE1F57E9-A80A-4AC1-BEBC-AC8CB543C91F}" dt="2025-01-20T08:57:22.171" v="2"/>
-            <ac:spMkLst>
-              <pc:docMk/>
-              <pc:sldMasterMk cId="0" sldId="2147483648"/>
-              <pc:sldLayoutMk cId="0" sldId="2147483653"/>
-              <ac:spMk id="5" creationId="{00000000-0000-0000-0000-000000000000}"/>
-            </ac:spMkLst>
-          </pc:spChg>
-          <pc:spChg chg="mod">
-            <ac:chgData name="Susana Vásquez" userId="dffc548e-2323-4ffc-a8aa-757e426c1faa" providerId="ADAL" clId="{AE1F57E9-A80A-4AC1-BEBC-AC8CB543C91F}" dt="2025-01-20T08:57:22.171" v="2"/>
-            <ac:spMkLst>
-              <pc:docMk/>
-              <pc:sldMasterMk cId="0" sldId="2147483648"/>
-              <pc:sldLayoutMk cId="0" sldId="2147483653"/>
-              <ac:spMk id="6" creationId="{00000000-0000-0000-0000-000000000000}"/>
-            </ac:spMkLst>
-          </pc:spChg>
         </pc:sldLayoutChg>
         <pc:sldLayoutChg chg="modSp">
           <pc:chgData name="Susana Vásquez" userId="dffc548e-2323-4ffc-a8aa-757e426c1faa" providerId="ADAL" clId="{AE1F57E9-A80A-4AC1-BEBC-AC8CB543C91F}" dt="2025-01-20T08:57:22.171" v="2"/>
@@ -878,33 +374,6 @@
             <pc:sldMasterMk cId="0" sldId="2147483648"/>
             <pc:sldLayoutMk cId="0" sldId="2147483656"/>
           </pc:sldLayoutMkLst>
-          <pc:spChg chg="mod">
-            <ac:chgData name="Susana Vásquez" userId="dffc548e-2323-4ffc-a8aa-757e426c1faa" providerId="ADAL" clId="{AE1F57E9-A80A-4AC1-BEBC-AC8CB543C91F}" dt="2025-01-20T08:57:22.171" v="2"/>
-            <ac:spMkLst>
-              <pc:docMk/>
-              <pc:sldMasterMk cId="0" sldId="2147483648"/>
-              <pc:sldLayoutMk cId="0" sldId="2147483656"/>
-              <ac:spMk id="2" creationId="{00000000-0000-0000-0000-000000000000}"/>
-            </ac:spMkLst>
-          </pc:spChg>
-          <pc:spChg chg="mod">
-            <ac:chgData name="Susana Vásquez" userId="dffc548e-2323-4ffc-a8aa-757e426c1faa" providerId="ADAL" clId="{AE1F57E9-A80A-4AC1-BEBC-AC8CB543C91F}" dt="2025-01-20T08:57:22.171" v="2"/>
-            <ac:spMkLst>
-              <pc:docMk/>
-              <pc:sldMasterMk cId="0" sldId="2147483648"/>
-              <pc:sldLayoutMk cId="0" sldId="2147483656"/>
-              <ac:spMk id="3" creationId="{00000000-0000-0000-0000-000000000000}"/>
-            </ac:spMkLst>
-          </pc:spChg>
-          <pc:spChg chg="mod">
-            <ac:chgData name="Susana Vásquez" userId="dffc548e-2323-4ffc-a8aa-757e426c1faa" providerId="ADAL" clId="{AE1F57E9-A80A-4AC1-BEBC-AC8CB543C91F}" dt="2025-01-20T08:57:22.171" v="2"/>
-            <ac:spMkLst>
-              <pc:docMk/>
-              <pc:sldMasterMk cId="0" sldId="2147483648"/>
-              <pc:sldLayoutMk cId="0" sldId="2147483656"/>
-              <ac:spMk id="4" creationId="{00000000-0000-0000-0000-000000000000}"/>
-            </ac:spMkLst>
-          </pc:spChg>
         </pc:sldLayoutChg>
         <pc:sldLayoutChg chg="modSp">
           <pc:chgData name="Susana Vásquez" userId="dffc548e-2323-4ffc-a8aa-757e426c1faa" providerId="ADAL" clId="{AE1F57E9-A80A-4AC1-BEBC-AC8CB543C91F}" dt="2025-01-20T08:57:22.171" v="2"/>
@@ -913,33 +382,6 @@
             <pc:sldMasterMk cId="0" sldId="2147483648"/>
             <pc:sldLayoutMk cId="0" sldId="2147483657"/>
           </pc:sldLayoutMkLst>
-          <pc:spChg chg="mod">
-            <ac:chgData name="Susana Vásquez" userId="dffc548e-2323-4ffc-a8aa-757e426c1faa" providerId="ADAL" clId="{AE1F57E9-A80A-4AC1-BEBC-AC8CB543C91F}" dt="2025-01-20T08:57:22.171" v="2"/>
-            <ac:spMkLst>
-              <pc:docMk/>
-              <pc:sldMasterMk cId="0" sldId="2147483648"/>
-              <pc:sldLayoutMk cId="0" sldId="2147483657"/>
-              <ac:spMk id="2" creationId="{00000000-0000-0000-0000-000000000000}"/>
-            </ac:spMkLst>
-          </pc:spChg>
-          <pc:spChg chg="mod">
-            <ac:chgData name="Susana Vásquez" userId="dffc548e-2323-4ffc-a8aa-757e426c1faa" providerId="ADAL" clId="{AE1F57E9-A80A-4AC1-BEBC-AC8CB543C91F}" dt="2025-01-20T08:57:22.171" v="2"/>
-            <ac:spMkLst>
-              <pc:docMk/>
-              <pc:sldMasterMk cId="0" sldId="2147483648"/>
-              <pc:sldLayoutMk cId="0" sldId="2147483657"/>
-              <ac:spMk id="3" creationId="{00000000-0000-0000-0000-000000000000}"/>
-            </ac:spMkLst>
-          </pc:spChg>
-          <pc:spChg chg="mod">
-            <ac:chgData name="Susana Vásquez" userId="dffc548e-2323-4ffc-a8aa-757e426c1faa" providerId="ADAL" clId="{AE1F57E9-A80A-4AC1-BEBC-AC8CB543C91F}" dt="2025-01-20T08:57:22.171" v="2"/>
-            <ac:spMkLst>
-              <pc:docMk/>
-              <pc:sldMasterMk cId="0" sldId="2147483648"/>
-              <pc:sldLayoutMk cId="0" sldId="2147483657"/>
-              <ac:spMk id="4" creationId="{00000000-0000-0000-0000-000000000000}"/>
-            </ac:spMkLst>
-          </pc:spChg>
         </pc:sldLayoutChg>
         <pc:sldLayoutChg chg="modSp">
           <pc:chgData name="Susana Vásquez" userId="dffc548e-2323-4ffc-a8aa-757e426c1faa" providerId="ADAL" clId="{AE1F57E9-A80A-4AC1-BEBC-AC8CB543C91F}" dt="2025-01-20T08:57:22.171" v="2"/>
@@ -948,24 +390,6 @@
             <pc:sldMasterMk cId="0" sldId="2147483648"/>
             <pc:sldLayoutMk cId="0" sldId="2147483659"/>
           </pc:sldLayoutMkLst>
-          <pc:spChg chg="mod">
-            <ac:chgData name="Susana Vásquez" userId="dffc548e-2323-4ffc-a8aa-757e426c1faa" providerId="ADAL" clId="{AE1F57E9-A80A-4AC1-BEBC-AC8CB543C91F}" dt="2025-01-20T08:57:22.171" v="2"/>
-            <ac:spMkLst>
-              <pc:docMk/>
-              <pc:sldMasterMk cId="0" sldId="2147483648"/>
-              <pc:sldLayoutMk cId="0" sldId="2147483659"/>
-              <ac:spMk id="2" creationId="{00000000-0000-0000-0000-000000000000}"/>
-            </ac:spMkLst>
-          </pc:spChg>
-          <pc:spChg chg="mod">
-            <ac:chgData name="Susana Vásquez" userId="dffc548e-2323-4ffc-a8aa-757e426c1faa" providerId="ADAL" clId="{AE1F57E9-A80A-4AC1-BEBC-AC8CB543C91F}" dt="2025-01-20T08:57:22.171" v="2"/>
-            <ac:spMkLst>
-              <pc:docMk/>
-              <pc:sldMasterMk cId="0" sldId="2147483648"/>
-              <pc:sldLayoutMk cId="0" sldId="2147483659"/>
-              <ac:spMk id="3" creationId="{00000000-0000-0000-0000-000000000000}"/>
-            </ac:spMkLst>
-          </pc:spChg>
         </pc:sldLayoutChg>
       </pc:sldMasterChg>
     </pc:docChg>
@@ -1153,7 +577,7 @@
             <a:fld id="{1D8BD707-D9CF-40AE-B4C6-C98DA3205C09}" type="datetimeFigureOut">
               <a:rPr lang="en-US" smtClean="0"/>
               <a:pPr/>
-              <a:t>1/20/2025</a:t>
+              <a:t>10/16/2025</a:t>
             </a:fld>
             <a:endParaRPr lang="en-US"/>
           </a:p>
@@ -1318,7 +742,7 @@
             <a:fld id="{1D8BD707-D9CF-40AE-B4C6-C98DA3205C09}" type="datetimeFigureOut">
               <a:rPr lang="en-US" smtClean="0"/>
               <a:pPr/>
-              <a:t>1/20/2025</a:t>
+              <a:t>10/16/2025</a:t>
             </a:fld>
             <a:endParaRPr lang="en-US"/>
           </a:p>
@@ -1493,7 +917,7 @@
             <a:fld id="{1D8BD707-D9CF-40AE-B4C6-C98DA3205C09}" type="datetimeFigureOut">
               <a:rPr lang="en-US" smtClean="0"/>
               <a:pPr/>
-              <a:t>1/20/2025</a:t>
+              <a:t>10/16/2025</a:t>
             </a:fld>
             <a:endParaRPr lang="en-US"/>
           </a:p>
@@ -1658,7 +1082,7 @@
             <a:fld id="{1D8BD707-D9CF-40AE-B4C6-C98DA3205C09}" type="datetimeFigureOut">
               <a:rPr lang="en-US" smtClean="0"/>
               <a:pPr/>
-              <a:t>1/20/2025</a:t>
+              <a:t>10/16/2025</a:t>
             </a:fld>
             <a:endParaRPr lang="en-US"/>
           </a:p>
@@ -1900,7 +1324,7 @@
             <a:fld id="{1D8BD707-D9CF-40AE-B4C6-C98DA3205C09}" type="datetimeFigureOut">
               <a:rPr lang="en-US" smtClean="0"/>
               <a:pPr/>
-              <a:t>1/20/2025</a:t>
+              <a:t>10/16/2025</a:t>
             </a:fld>
             <a:endParaRPr lang="en-US"/>
           </a:p>
@@ -2182,7 +1606,7 @@
             <a:fld id="{1D8BD707-D9CF-40AE-B4C6-C98DA3205C09}" type="datetimeFigureOut">
               <a:rPr lang="en-US" smtClean="0"/>
               <a:pPr/>
-              <a:t>1/20/2025</a:t>
+              <a:t>10/16/2025</a:t>
             </a:fld>
             <a:endParaRPr lang="en-US"/>
           </a:p>
@@ -2598,7 +2022,7 @@
             <a:fld id="{1D8BD707-D9CF-40AE-B4C6-C98DA3205C09}" type="datetimeFigureOut">
               <a:rPr lang="en-US" smtClean="0"/>
               <a:pPr/>
-              <a:t>1/20/2025</a:t>
+              <a:t>10/16/2025</a:t>
             </a:fld>
             <a:endParaRPr lang="en-US"/>
           </a:p>
@@ -2712,7 +2136,7 @@
             <a:fld id="{1D8BD707-D9CF-40AE-B4C6-C98DA3205C09}" type="datetimeFigureOut">
               <a:rPr lang="en-US" smtClean="0"/>
               <a:pPr/>
-              <a:t>1/20/2025</a:t>
+              <a:t>10/16/2025</a:t>
             </a:fld>
             <a:endParaRPr lang="en-US"/>
           </a:p>
@@ -2804,7 +2228,7 @@
             <a:fld id="{1D8BD707-D9CF-40AE-B4C6-C98DA3205C09}" type="datetimeFigureOut">
               <a:rPr lang="en-US" smtClean="0"/>
               <a:pPr/>
-              <a:t>1/20/2025</a:t>
+              <a:t>10/16/2025</a:t>
             </a:fld>
             <a:endParaRPr lang="en-US"/>
           </a:p>
@@ -3076,7 +2500,7 @@
             <a:fld id="{1D8BD707-D9CF-40AE-B4C6-C98DA3205C09}" type="datetimeFigureOut">
               <a:rPr lang="en-US" smtClean="0"/>
               <a:pPr/>
-              <a:t>1/20/2025</a:t>
+              <a:t>10/16/2025</a:t>
             </a:fld>
             <a:endParaRPr lang="en-US"/>
           </a:p>
@@ -3325,7 +2749,7 @@
             <a:fld id="{1D8BD707-D9CF-40AE-B4C6-C98DA3205C09}" type="datetimeFigureOut">
               <a:rPr lang="en-US" smtClean="0"/>
               <a:pPr/>
-              <a:t>1/20/2025</a:t>
+              <a:t>10/16/2025</a:t>
             </a:fld>
             <a:endParaRPr lang="en-US"/>
           </a:p>
@@ -3533,7 +2957,7 @@
             <a:fld id="{1D8BD707-D9CF-40AE-B4C6-C98DA3205C09}" type="datetimeFigureOut">
               <a:rPr lang="en-US" smtClean="0"/>
               <a:pPr/>
-              <a:t>1/20/2025</a:t>
+              <a:t>10/16/2025</a:t>
             </a:fld>
             <a:endParaRPr lang="en-US"/>
           </a:p>
@@ -9859,6 +9283,98 @@
           </p:txBody>
         </p:sp>
       </p:grpSp>
+      <p:pic>
+        <p:nvPicPr>
+          <p:cNvPr id="3" name="Picture 2" descr="A grey square with white text&#10;&#10;AI-generated content may be incorrect.">
+            <a:extLst>
+              <a:ext uri="{FF2B5EF4-FFF2-40B4-BE49-F238E27FC236}">
+                <a16:creationId xmlns:a16="http://schemas.microsoft.com/office/drawing/2014/main" id="{2ADF4236-C311-988C-1EAF-F33444BF8989}"/>
+              </a:ext>
+            </a:extLst>
+          </p:cNvPr>
+          <p:cNvPicPr>
+            <a:picLocks noChangeAspect="1"/>
+          </p:cNvPicPr>
+          <p:nvPr/>
+        </p:nvPicPr>
+        <p:blipFill rotWithShape="1">
+          <a:blip r:embed="rId35">
+            <a:extLst>
+              <a:ext uri="{28A0092B-C50C-407E-A947-70E740481C1C}">
+                <a14:useLocalDpi xmlns:a14="http://schemas.microsoft.com/office/drawing/2010/main" val="0"/>
+              </a:ext>
+            </a:extLst>
+          </a:blip>
+          <a:srcRect r="18171" b="16231"/>
+          <a:stretch>
+            <a:fillRect/>
+          </a:stretch>
+        </p:blipFill>
+        <p:spPr bwMode="auto">
+          <a:xfrm>
+            <a:off x="14955841" y="581362"/>
+            <a:ext cx="2408369" cy="640819"/>
+          </a:xfrm>
+          <a:prstGeom prst="rect">
+            <a:avLst/>
+          </a:prstGeom>
+          <a:noFill/>
+          <a:ln>
+            <a:noFill/>
+          </a:ln>
+          <a:extLst>
+            <a:ext uri="{53640926-AAD7-44D8-BBD7-CCE9431645EC}">
+              <a14:shadowObscured xmlns:a14="http://schemas.microsoft.com/office/drawing/2010/main"/>
+            </a:ext>
+          </a:extLst>
+        </p:spPr>
+      </p:pic>
+      <p:pic>
+        <p:nvPicPr>
+          <p:cNvPr id="4" name="Gráfico 5">
+            <a:extLst>
+              <a:ext uri="{FF2B5EF4-FFF2-40B4-BE49-F238E27FC236}">
+                <a16:creationId xmlns:a16="http://schemas.microsoft.com/office/drawing/2014/main" id="{30C983FE-D01A-C6D6-8709-92759D947C0A}"/>
+              </a:ext>
+            </a:extLst>
+          </p:cNvPr>
+          <p:cNvPicPr>
+            <a:picLocks noChangeAspect="1"/>
+          </p:cNvPicPr>
+          <p:nvPr/>
+        </p:nvPicPr>
+        <p:blipFill rotWithShape="1">
+          <a:blip r:embed="rId36">
+            <a:extLst>
+              <a:ext uri="{28A0092B-C50C-407E-A947-70E740481C1C}">
+                <a14:useLocalDpi xmlns:a14="http://schemas.microsoft.com/office/drawing/2010/main" val="0"/>
+              </a:ext>
+              <a:ext uri="{96DAC541-7B7A-43D3-8B79-37D633B846F1}">
+                <asvg:svgBlip xmlns:asvg="http://schemas.microsoft.com/office/drawing/2016/SVG/main" r:embed="rId37"/>
+              </a:ext>
+            </a:extLst>
+          </a:blip>
+          <a:srcRect l="12497" t="14853" r="20703" b="13215"/>
+          <a:stretch/>
+        </p:blipFill>
+        <p:spPr bwMode="auto">
+          <a:xfrm>
+            <a:off x="17598200" y="423140"/>
+            <a:ext cx="1216025" cy="909955"/>
+          </a:xfrm>
+          <a:prstGeom prst="rect">
+            <a:avLst/>
+          </a:prstGeom>
+          <a:ln>
+            <a:noFill/>
+          </a:ln>
+          <a:extLst>
+            <a:ext uri="{53640926-AAD7-44D8-BBD7-CCE9431645EC}">
+              <a14:shadowObscured xmlns:a14="http://schemas.microsoft.com/office/drawing/2010/main"/>
+            </a:ext>
+          </a:extLst>
+        </p:spPr>
+      </p:pic>
     </p:spTree>
   </p:cSld>
   <p:clrMapOvr>
